--- a/week-07/presentations/ppts/day-02-ado-usage.pptx
+++ b/week-07/presentations/ppts/day-02-ado-usage.pptx
@@ -1449,7 +1449,7 @@
             </a:pPr>
             <a:r>
               <a:rPr/>
-              <a:t>By 16:00, every triad has DP §2 with loaded ADO + queries + boards.</a:t>
+              <a:t>By 16:00, every triad has DP Section 2 with loaded ADO + queries + boards.</a:t>
             </a:r>
           </a:p>
         </p:txBody>
@@ -5586,7 +5586,7 @@
             </a:pPr>
             <a:r>
               <a:rPr/>
-              <a:t>From PRD §6; testable</a:t>
+              <a:t>From PRD Section 6; testable</a:t>
             </a:r>
           </a:p>
           <a:p>
@@ -6890,7 +6890,7 @@
             </a:pPr>
             <a:r>
               <a:rPr/>
-              <a:t>🧿 AI as Standup-Prep Aid</a:t>
+              <a:t>🤖 AI as Standup-Prep Aid</a:t>
             </a:r>
           </a:p>
         </p:txBody>
@@ -7026,7 +7026,7 @@
             </a:pPr>
             <a:r>
               <a:rPr/>
-              <a:t>10 min: document §2 with links / screenshots</a:t>
+              <a:t>10 min: document Section 2 with links / screenshots</a:t>
             </a:r>
           </a:p>
           <a:p>
@@ -7170,7 +7170,7 @@
             </a:pPr>
             <a:r>
               <a:rPr/>
-              <a:t>DP §2 drafted</a:t>
+              <a:t>DP Section 2 drafted</a:t>
             </a:r>
           </a:p>
           <a:p>
@@ -7215,7 +7215,7 @@
             </a:pPr>
             <a:r>
               <a:rPr/>
-              <a:t>Bring to Day 3: Loaded ADO + DP §2. Tomorrow we wire tracking on top.</a:t>
+              <a:t>Bring to Day 3: Loaded ADO + DP Section 2. Tomorrow we wire tracking on top.</a:t>
             </a:r>
           </a:p>
         </p:txBody>
@@ -7524,7 +7524,7 @@
             </a:pPr>
             <a:r>
               <a:rPr/>
-              <a:t>ADO access check; pin DP §1</a:t>
+              <a:t>ADO access check; pin DP Section 1</a:t>
             </a:r>
           </a:p>
           <a:p>
@@ -8112,7 +8112,7 @@
             </a:pPr>
             <a:r>
               <a:rPr/>
-              <a:t>NFRs from PRD §7 / TCD §3 §4 are work too. They get their own User Stories tagged non-functional.</a:t>
+              <a:t>NFRs from PRD Section 7 / TCD Section 3 Section 4 are work too. They get their own User Stories tagged non-functional.</a:t>
             </a:r>
           </a:p>
         </p:txBody>
@@ -8214,7 +8214,7 @@
             </a:pPr>
             <a:r>
               <a:rPr/>
-              <a:t>15 min: 5–10 User Stories from PRD §6 ACs</a:t>
+              <a:t>15 min: 5–10 User Stories from PRD Section 6 ACs</a:t>
             </a:r>
           </a:p>
           <a:p>

--- a/week-07/presentations/ppts/day-02-ado-usage.pptx
+++ b/week-07/presentations/ppts/day-02-ado-usage.pptx
@@ -6915,7 +6915,7 @@
             </a:pPr>
             <a:r>
               <a:rPr/>
-              <a:t>Validation discipline: cross-check claims against actual ADO data. Same Wk 5 D5 rule.</a:t>
+              <a:t>Validation discipline: cross-check claims against actual Azure DevOps (ADO) data. Same Wk 5 D5 rule.</a:t>
             </a:r>
           </a:p>
         </p:txBody>
@@ -7170,7 +7170,7 @@
             </a:pPr>
             <a:r>
               <a:rPr/>
-              <a:t>DP Section 2 drafted</a:t>
+              <a:t>Delivery Plan (DP) Section 2 drafted</a:t>
             </a:r>
           </a:p>
           <a:p>
@@ -7398,7 +7398,7 @@
             </a:pPr>
             <a:r>
               <a:rPr/>
-              <a:t>Read the 3 standard charts: CFD, burn-down, velocity</a:t>
+              <a:t>Read the 3 standard charts: cumulative flow diagram (CFD), burn-down, velocity</a:t>
             </a:r>
           </a:p>
           <a:p>
@@ -7779,6 +7779,15 @@
             </a:pPr>
             <a:r>
               <a:rPr/>
+              <a:t>These terms recur all day — including Work Item Query Language (WIQL), the query syntax.</a:t>
+            </a:r>
+          </a:p>
+          <a:p>
+            <a:pPr lvl="0" indent="0" marL="0">
+              <a:buNone/>
+            </a:pPr>
+            <a:r>
+              <a:rPr/>
               <a:t>Term</a:t>
             </a:r>
           </a:p>
@@ -8085,16 +8094,16 @@
             </a:pPr>
             <a:r>
               <a:rPr/>
-              <a:t>1 Feature — your PRD (e.g., “Reconcile flow”)</a:t>
-            </a:r>
-          </a:p>
-          <a:p>
-            <a:pPr lvl="0" indent="0" marL="0">
-              <a:buNone/>
-            </a:pPr>
-            <a:r>
-              <a:rPr/>
-              <a:t>5–10 User Stories — each AC roughly maps to one</a:t>
+              <a:t>1 Feature — your Product Requirements Document (PRD) (e.g., “Reconcile flow”)</a:t>
+            </a:r>
+          </a:p>
+          <a:p>
+            <a:pPr lvl="0" indent="0" marL="0">
+              <a:buNone/>
+            </a:pPr>
+            <a:r>
+              <a:rPr/>
+              <a:t>5–10 User Stories — each acceptance criteria (AC) roughly maps to one</a:t>
             </a:r>
           </a:p>
           <a:p>
@@ -8112,7 +8121,7 @@
             </a:pPr>
             <a:r>
               <a:rPr/>
-              <a:t>NFRs from PRD Section 7 / TCD Section 3 Section 4 are work too. They get their own User Stories tagged non-functional.</a:t>
+              <a:t>Non-functional requirements (NFRs) from PRD Section 7 / Technical Concept Document (TCD) Section 3 Section 4 are work too. They get their own User Stories tagged non-functional.</a:t>
             </a:r>
           </a:p>
         </p:txBody>

--- a/week-07/presentations/ppts/day-02-ado-usage.pptx
+++ b/week-07/presentations/ppts/day-02-ado-usage.pptx
@@ -6910,6 +6910,27 @@
           <a:bodyPr/>
           <a:lstStyle/>
           <a:p>
+            <a:pPr lvl="0" indent="0">
+              <a:buNone/>
+            </a:pPr>
+            <a:r>
+              <a:rPr>
+                <a:latin typeface="Courier"/>
+              </a:rPr>
+              <a:t>Role: Standup-prep assistant for a TPM.
+Context: &lt;yesterday's ADO query results — items moved state,
+items added, items closed, comments added&gt;
+Task: Produce a 5-bullet standup summary:
+1. Top 2 things shipped
+2. Top 2 things blocked or stuck (&gt;2 days no movement)
+3. 1 anomaly (pattern unusual for this team)
+Constraints:
+- Use only the provided data
+- Flag anything you can't determine
+Format: 5 numbered bullets, each &lt;15 words.</a:t>
+            </a:r>
+          </a:p>
+          <a:p>
             <a:pPr lvl="0" indent="0" marL="0">
               <a:buNone/>
             </a:pPr>
@@ -8007,6 +8028,23 @@
         <p:txBody>
           <a:bodyPr/>
           <a:lstStyle/>
+          <a:p>
+            <a:pPr lvl="0" indent="0">
+              <a:buNone/>
+            </a:pPr>
+            <a:r>
+              <a:rPr>
+                <a:latin typeface="Courier"/>
+              </a:rPr>
+              <a:t>Epic — strategic theme; ~1 per quarterly initiative
+├── Feature — deliverable slice; 1–3 per Epic
+│   ├── User Story — user-visible value
+│   │   └── Task — engineering / design / TPM work
+│   └── User Story
+│       └── Task
+└── Feature</a:t>
+            </a:r>
+          </a:p>
           <a:p>
             <a:pPr lvl="0" indent="0" marL="0">
               <a:buNone/>

--- a/week-07/presentations/ppts/day-02-ado-usage.pptx
+++ b/week-07/presentations/ppts/day-02-ado-usage.pptx
@@ -1449,7 +1449,7 @@
             </a:pPr>
             <a:r>
               <a:rPr/>
-              <a:t>By 16:00, every triad has DP Section 2 with loaded ADO + queries + boards.</a:t>
+              <a:t>By 16:00, every quad has DP Section 2 with loaded ADO + queries + boards.</a:t>
             </a:r>
           </a:p>
         </p:txBody>
@@ -2269,7 +2269,7 @@
             </a:pPr>
             <a:r>
               <a:rPr/>
-              <a:t>Watch for triads who skip NFRs entirely. Coach back.</a:t>
+              <a:t>Watch for quads who skip NFRs entirely. Coach back.</a:t>
             </a:r>
           </a:p>
         </p:txBody>
@@ -5994,7 +5994,7 @@
             </a:pPr>
             <a:r>
               <a:rPr b="1"/>
-              <a:t>Triads • 40 minutes</a:t>
+              <a:t>Quads • 40 minutes</a:t>
             </a:r>
           </a:p>
           <a:p>
@@ -6504,7 +6504,7 @@
             </a:pPr>
             <a:r>
               <a:rPr b="1"/>
-              <a:t>Triads • 40 minutes</a:t>
+              <a:t>Quads • 40 minutes</a:t>
             </a:r>
           </a:p>
           <a:p>
@@ -7011,7 +7011,7 @@
             </a:pPr>
             <a:r>
               <a:rPr b="1"/>
-              <a:t>Triads • 45 minutes • Wrap</a:t>
+              <a:t>Quads • 45 minutes • Wrap</a:t>
             </a:r>
           </a:p>
           <a:p>
@@ -8234,7 +8234,7 @@
             </a:pPr>
             <a:r>
               <a:rPr b="1"/>
-              <a:t>Triads • 35 minutes</a:t>
+              <a:t>Quads • 35 minutes</a:t>
             </a:r>
           </a:p>
           <a:p>

--- a/week-07/presentations/ppts/day-02-ado-usage.pptx
+++ b/week-07/presentations/ppts/day-02-ado-usage.pptx
@@ -5994,7 +5994,7 @@
             </a:pPr>
             <a:r>
               <a:rPr b="1"/>
-              <a:t>Quads • 40 minutes</a:t>
+              <a:t>Quads • 50 minutes</a:t>
             </a:r>
           </a:p>
           <a:p>
@@ -6504,7 +6504,7 @@
             </a:pPr>
             <a:r>
               <a:rPr b="1"/>
-              <a:t>Quads • 40 minutes</a:t>
+              <a:t>Quads • 50 minutes</a:t>
             </a:r>
           </a:p>
           <a:p>
@@ -7011,7 +7011,7 @@
             </a:pPr>
             <a:r>
               <a:rPr b="1"/>
-              <a:t>Quads • 45 minutes • Wrap</a:t>
+              <a:t>Quads • 55 minutes • Wrap</a:t>
             </a:r>
           </a:p>
           <a:p>
@@ -8234,7 +8234,7 @@
             </a:pPr>
             <a:r>
               <a:rPr b="1"/>
-              <a:t>Quads • 35 minutes</a:t>
+              <a:t>Quads • 45 minutes</a:t>
             </a:r>
           </a:p>
           <a:p>

--- a/week-07/presentations/ppts/day-02-ado-usage.pptx
+++ b/week-07/presentations/ppts/day-02-ado-usage.pptx
@@ -6003,7 +6003,7 @@
             </a:pPr>
             <a:r>
               <a:rPr/>
-              <a:t>15 min: field pass on every work item</a:t>
+              <a:t>25 min: field pass on every work item</a:t>
             </a:r>
           </a:p>
           <a:p>
@@ -6030,7 +6030,7 @@
             </a:pPr>
             <a:r>
               <a:rPr/>
-              <a:t>⏱ 15 + 10 + 15</a:t>
+              <a:t>⏱ 25 + 10 + 15</a:t>
             </a:r>
           </a:p>
         </p:txBody>
@@ -6513,7 +6513,7 @@
             </a:pPr>
             <a:r>
               <a:rPr/>
-              <a:t>15 min: build all 5 queries</a:t>
+              <a:t>25 min: build all 5 queries</a:t>
             </a:r>
           </a:p>
           <a:p>
@@ -6549,7 +6549,7 @@
             </a:pPr>
             <a:r>
               <a:rPr/>
-              <a:t>⏱ 15 + 10 + 10 + 5</a:t>
+              <a:t>⏱ 25 + 10 + 10 + 5</a:t>
             </a:r>
           </a:p>
         </p:txBody>
@@ -7020,7 +7020,7 @@
             </a:pPr>
             <a:r>
               <a:rPr/>
-              <a:t>15 min: walk the 3 charts; what would you look for?</a:t>
+              <a:t>25 min: walk the 3 charts; what would you look for?</a:t>
             </a:r>
           </a:p>
           <a:p>
@@ -7056,7 +7056,7 @@
             </a:pPr>
             <a:r>
               <a:rPr/>
-              <a:t>⏱ 15 + 10 + 10 + 10 · 15-min wrap</a:t>
+              <a:t>⏱ 25 + 10 + 10 + 10 · 15-min wrap</a:t>
             </a:r>
           </a:p>
         </p:txBody>
@@ -8261,7 +8261,7 @@
             </a:pPr>
             <a:r>
               <a:rPr/>
-              <a:t>15 min: 5–10 User Stories from PRD Section 6 ACs</a:t>
+              <a:t>25 min: 5–10 User Stories from PRD Section 6 ACs</a:t>
             </a:r>
           </a:p>
           <a:p>
@@ -8279,7 +8279,7 @@
             </a:pPr>
             <a:r>
               <a:rPr/>
-              <a:t>⏱ 5 + 5 + 15 + 10</a:t>
+              <a:t>⏱ 5 + 5 + 25 + 10</a:t>
             </a:r>
           </a:p>
         </p:txBody>
